--- a/day_15/day 15.pptx
+++ b/day_15/day 15.pptx
@@ -31626,7 +31626,7 @@
             </a:pPr>
             <a:r>
               <a:rPr lang="en-US" dirty="0"/>
-              <a:t>NumPy Indexing, Broadcasting &amp; Universal Functions</a:t>
+              <a:t>		NumPy Indexing, Broadcasting &amp; Universal Functions</a:t>
             </a:r>
           </a:p>
         </p:txBody>
